--- a/presentation_projet_c.pptx
+++ b/presentation_projet_c.pptx
@@ -5,23 +5,23 @@
     <p:sldMasterId id="2147483648" r:id="rId1"/>
   </p:sldMasterIdLst>
   <p:sldIdLst>
-    <p:sldId id="256" r:id="rId7"/>
-    <p:sldId id="257" r:id="rId8"/>
-    <p:sldId id="258" r:id="rId9"/>
-    <p:sldId id="259" r:id="rId10"/>
-    <p:sldId id="260" r:id="rId11"/>
-    <p:sldId id="261" r:id="rId12"/>
-    <p:sldId id="262" r:id="rId13"/>
-    <p:sldId id="263" r:id="rId14"/>
-    <p:sldId id="264" r:id="rId15"/>
-    <p:sldId id="265" r:id="rId16"/>
-    <p:sldId id="266" r:id="rId17"/>
-    <p:sldId id="267" r:id="rId18"/>
-    <p:sldId id="268" r:id="rId19"/>
-    <p:sldId id="269" r:id="rId20"/>
-    <p:sldId id="270" r:id="rId21"/>
+    <p:sldId id="256" r:id="rId2"/>
+    <p:sldId id="257" r:id="rId3"/>
+    <p:sldId id="258" r:id="rId4"/>
+    <p:sldId id="259" r:id="rId5"/>
+    <p:sldId id="260" r:id="rId6"/>
+    <p:sldId id="261" r:id="rId7"/>
+    <p:sldId id="262" r:id="rId8"/>
+    <p:sldId id="263" r:id="rId9"/>
+    <p:sldId id="264" r:id="rId10"/>
+    <p:sldId id="265" r:id="rId11"/>
+    <p:sldId id="266" r:id="rId12"/>
+    <p:sldId id="267" r:id="rId13"/>
+    <p:sldId id="268" r:id="rId14"/>
+    <p:sldId id="269" r:id="rId15"/>
+    <p:sldId id="270" r:id="rId16"/>
   </p:sldIdLst>
-  <p:sldSz cx="12188952" cy="6858000" type="screen4x3"/>
+  <p:sldSz cx="12188825" cy="6858000"/>
   <p:notesSz cx="6858000" cy="9144000"/>
   <p:defaultTextStyle>
     <a:defPPr>
@@ -118,6 +118,22 @@
       </a:defRPr>
     </a:lvl9pPr>
   </p:defaultTextStyle>
+  <p:extLst>
+    <p:ext uri="{EFAFB233-063F-42B5-8137-9DF3F51BA10A}">
+      <p15:sldGuideLst xmlns:p15="http://schemas.microsoft.com/office/powerpoint/2012/main">
+        <p15:guide id="1" orient="horz" pos="2160">
+          <p15:clr>
+            <a:srgbClr val="A4A3A4"/>
+          </p15:clr>
+        </p15:guide>
+        <p15:guide id="2" pos="2880">
+          <p15:clr>
+            <a:srgbClr val="A4A3A4"/>
+          </p15:clr>
+        </p15:guide>
+      </p15:sldGuideLst>
+    </p:ext>
+  </p:extLst>
 </p:presentation>
 </file>
 
@@ -159,10 +175,9 @@
           <a:lstStyle/>
           <a:p>
             <a:r>
-              <a:rPr lang="en-US" smtClean="0"/>
+              <a:rPr lang="en-US"/>
               <a:t>Click to edit Master title style</a:t>
             </a:r>
-            <a:endParaRPr lang="en-US"/>
           </a:p>
         </p:txBody>
       </p:sp>
@@ -278,10 +293,9 @@
           </a:lstStyle>
           <a:p>
             <a:r>
-              <a:rPr lang="en-US" smtClean="0"/>
+              <a:rPr lang="en-US"/>
               <a:t>Click to edit Master subtitle style</a:t>
             </a:r>
-            <a:endParaRPr lang="en-US"/>
           </a:p>
         </p:txBody>
       </p:sp>
@@ -302,7 +316,7 @@
           <a:p>
             <a:fld id="{5BCAD085-E8A6-8845-BD4E-CB4CCA059FC4}" type="datetimeFigureOut">
               <a:rPr lang="en-US" smtClean="0"/>
-              <a:t>1/27/13</a:t>
+              <a:t>3/30/2026</a:t>
             </a:fld>
             <a:endParaRPr lang="en-US"/>
           </a:p>
@@ -344,7 +358,7 @@
           <a:p>
             <a:fld id="{C1FF6DA9-008F-8B48-92A6-B652298478BF}" type="slidenum">
               <a:rPr lang="en-US" smtClean="0"/>
-              <a:t>‹#›</a:t>
+              <a:t>‹N°›</a:t>
             </a:fld>
             <a:endParaRPr lang="en-US"/>
           </a:p>
@@ -396,10 +410,9 @@
           <a:lstStyle/>
           <a:p>
             <a:r>
-              <a:rPr lang="en-US" smtClean="0"/>
+              <a:rPr lang="en-US"/>
               <a:t>Click to edit Master title style</a:t>
             </a:r>
-            <a:endParaRPr lang="en-US"/>
           </a:p>
         </p:txBody>
       </p:sp>
@@ -420,38 +433,37 @@
           <a:p>
             <a:pPr lvl="0"/>
             <a:r>
-              <a:rPr lang="en-US" smtClean="0"/>
+              <a:rPr lang="en-US"/>
               <a:t>Click to edit Master text styles</a:t>
             </a:r>
           </a:p>
           <a:p>
             <a:pPr lvl="1"/>
             <a:r>
-              <a:rPr lang="en-US" smtClean="0"/>
+              <a:rPr lang="en-US"/>
               <a:t>Second level</a:t>
             </a:r>
           </a:p>
           <a:p>
             <a:pPr lvl="2"/>
             <a:r>
-              <a:rPr lang="en-US" smtClean="0"/>
+              <a:rPr lang="en-US"/>
               <a:t>Third level</a:t>
             </a:r>
           </a:p>
           <a:p>
             <a:pPr lvl="3"/>
             <a:r>
-              <a:rPr lang="en-US" smtClean="0"/>
+              <a:rPr lang="en-US"/>
               <a:t>Fourth level</a:t>
             </a:r>
           </a:p>
           <a:p>
             <a:pPr lvl="4"/>
             <a:r>
-              <a:rPr lang="en-US" smtClean="0"/>
+              <a:rPr lang="en-US"/>
               <a:t>Fifth level</a:t>
             </a:r>
-            <a:endParaRPr lang="en-US"/>
           </a:p>
         </p:txBody>
       </p:sp>
@@ -472,7 +484,7 @@
           <a:p>
             <a:fld id="{5BCAD085-E8A6-8845-BD4E-CB4CCA059FC4}" type="datetimeFigureOut">
               <a:rPr lang="en-US" smtClean="0"/>
-              <a:t>1/27/13</a:t>
+              <a:t>3/30/2026</a:t>
             </a:fld>
             <a:endParaRPr lang="en-US"/>
           </a:p>
@@ -514,7 +526,7 @@
           <a:p>
             <a:fld id="{C1FF6DA9-008F-8B48-92A6-B652298478BF}" type="slidenum">
               <a:rPr lang="en-US" smtClean="0"/>
-              <a:t>‹#›</a:t>
+              <a:t>‹N°›</a:t>
             </a:fld>
             <a:endParaRPr lang="en-US"/>
           </a:p>
@@ -571,10 +583,9 @@
           <a:lstStyle/>
           <a:p>
             <a:r>
-              <a:rPr lang="en-US" smtClean="0"/>
+              <a:rPr lang="en-US"/>
               <a:t>Click to edit Master title style</a:t>
             </a:r>
-            <a:endParaRPr lang="en-US"/>
           </a:p>
         </p:txBody>
       </p:sp>
@@ -600,38 +611,37 @@
           <a:p>
             <a:pPr lvl="0"/>
             <a:r>
-              <a:rPr lang="en-US" smtClean="0"/>
+              <a:rPr lang="en-US"/>
               <a:t>Click to edit Master text styles</a:t>
             </a:r>
           </a:p>
           <a:p>
             <a:pPr lvl="1"/>
             <a:r>
-              <a:rPr lang="en-US" smtClean="0"/>
+              <a:rPr lang="en-US"/>
               <a:t>Second level</a:t>
             </a:r>
           </a:p>
           <a:p>
             <a:pPr lvl="2"/>
             <a:r>
-              <a:rPr lang="en-US" smtClean="0"/>
+              <a:rPr lang="en-US"/>
               <a:t>Third level</a:t>
             </a:r>
           </a:p>
           <a:p>
             <a:pPr lvl="3"/>
             <a:r>
-              <a:rPr lang="en-US" smtClean="0"/>
+              <a:rPr lang="en-US"/>
               <a:t>Fourth level</a:t>
             </a:r>
           </a:p>
           <a:p>
             <a:pPr lvl="4"/>
             <a:r>
-              <a:rPr lang="en-US" smtClean="0"/>
+              <a:rPr lang="en-US"/>
               <a:t>Fifth level</a:t>
             </a:r>
-            <a:endParaRPr lang="en-US"/>
           </a:p>
         </p:txBody>
       </p:sp>
@@ -652,7 +662,7 @@
           <a:p>
             <a:fld id="{5BCAD085-E8A6-8845-BD4E-CB4CCA059FC4}" type="datetimeFigureOut">
               <a:rPr lang="en-US" smtClean="0"/>
-              <a:t>1/27/13</a:t>
+              <a:t>3/30/2026</a:t>
             </a:fld>
             <a:endParaRPr lang="en-US"/>
           </a:p>
@@ -694,7 +704,7 @@
           <a:p>
             <a:fld id="{C1FF6DA9-008F-8B48-92A6-B652298478BF}" type="slidenum">
               <a:rPr lang="en-US" smtClean="0"/>
-              <a:t>‹#›</a:t>
+              <a:t>‹N°›</a:t>
             </a:fld>
             <a:endParaRPr lang="en-US"/>
           </a:p>
@@ -746,10 +756,9 @@
           <a:lstStyle/>
           <a:p>
             <a:r>
-              <a:rPr lang="en-US" smtClean="0"/>
+              <a:rPr lang="en-US"/>
               <a:t>Click to edit Master title style</a:t>
             </a:r>
-            <a:endParaRPr lang="en-US"/>
           </a:p>
         </p:txBody>
       </p:sp>
@@ -770,38 +779,37 @@
           <a:p>
             <a:pPr lvl="0"/>
             <a:r>
-              <a:rPr lang="en-US" smtClean="0"/>
+              <a:rPr lang="en-US"/>
               <a:t>Click to edit Master text styles</a:t>
             </a:r>
           </a:p>
           <a:p>
             <a:pPr lvl="1"/>
             <a:r>
-              <a:rPr lang="en-US" smtClean="0"/>
+              <a:rPr lang="en-US"/>
               <a:t>Second level</a:t>
             </a:r>
           </a:p>
           <a:p>
             <a:pPr lvl="2"/>
             <a:r>
-              <a:rPr lang="en-US" smtClean="0"/>
+              <a:rPr lang="en-US"/>
               <a:t>Third level</a:t>
             </a:r>
           </a:p>
           <a:p>
             <a:pPr lvl="3"/>
             <a:r>
-              <a:rPr lang="en-US" smtClean="0"/>
+              <a:rPr lang="en-US"/>
               <a:t>Fourth level</a:t>
             </a:r>
           </a:p>
           <a:p>
             <a:pPr lvl="4"/>
             <a:r>
-              <a:rPr lang="en-US" smtClean="0"/>
+              <a:rPr lang="en-US"/>
               <a:t>Fifth level</a:t>
             </a:r>
-            <a:endParaRPr lang="en-US"/>
           </a:p>
         </p:txBody>
       </p:sp>
@@ -822,7 +830,7 @@
           <a:p>
             <a:fld id="{5BCAD085-E8A6-8845-BD4E-CB4CCA059FC4}" type="datetimeFigureOut">
               <a:rPr lang="en-US" smtClean="0"/>
-              <a:t>1/27/13</a:t>
+              <a:t>3/30/2026</a:t>
             </a:fld>
             <a:endParaRPr lang="en-US"/>
           </a:p>
@@ -864,7 +872,7 @@
           <a:p>
             <a:fld id="{C1FF6DA9-008F-8B48-92A6-B652298478BF}" type="slidenum">
               <a:rPr lang="en-US" smtClean="0"/>
-              <a:t>‹#›</a:t>
+              <a:t>‹N°›</a:t>
             </a:fld>
             <a:endParaRPr lang="en-US"/>
           </a:p>
@@ -925,10 +933,9 @@
           </a:lstStyle>
           <a:p>
             <a:r>
-              <a:rPr lang="en-US" smtClean="0"/>
+              <a:rPr lang="en-US"/>
               <a:t>Click to edit Master title style</a:t>
             </a:r>
-            <a:endParaRPr lang="en-US"/>
           </a:p>
         </p:txBody>
       </p:sp>
@@ -1045,7 +1052,7 @@
           <a:p>
             <a:pPr lvl="0"/>
             <a:r>
-              <a:rPr lang="en-US" smtClean="0"/>
+              <a:rPr lang="en-US"/>
               <a:t>Click to edit Master text styles</a:t>
             </a:r>
           </a:p>
@@ -1068,7 +1075,7 @@
           <a:p>
             <a:fld id="{5BCAD085-E8A6-8845-BD4E-CB4CCA059FC4}" type="datetimeFigureOut">
               <a:rPr lang="en-US" smtClean="0"/>
-              <a:t>1/27/13</a:t>
+              <a:t>3/30/2026</a:t>
             </a:fld>
             <a:endParaRPr lang="en-US"/>
           </a:p>
@@ -1110,7 +1117,7 @@
           <a:p>
             <a:fld id="{C1FF6DA9-008F-8B48-92A6-B652298478BF}" type="slidenum">
               <a:rPr lang="en-US" smtClean="0"/>
-              <a:t>‹#›</a:t>
+              <a:t>‹N°›</a:t>
             </a:fld>
             <a:endParaRPr lang="en-US"/>
           </a:p>
@@ -1162,10 +1169,9 @@
           <a:lstStyle/>
           <a:p>
             <a:r>
-              <a:rPr lang="en-US" smtClean="0"/>
+              <a:rPr lang="en-US"/>
               <a:t>Click to edit Master title style</a:t>
             </a:r>
-            <a:endParaRPr lang="en-US"/>
           </a:p>
         </p:txBody>
       </p:sp>
@@ -1219,38 +1225,37 @@
           <a:p>
             <a:pPr lvl="0"/>
             <a:r>
-              <a:rPr lang="en-US" smtClean="0"/>
+              <a:rPr lang="en-US"/>
               <a:t>Click to edit Master text styles</a:t>
             </a:r>
           </a:p>
           <a:p>
             <a:pPr lvl="1"/>
             <a:r>
-              <a:rPr lang="en-US" smtClean="0"/>
+              <a:rPr lang="en-US"/>
               <a:t>Second level</a:t>
             </a:r>
           </a:p>
           <a:p>
             <a:pPr lvl="2"/>
             <a:r>
-              <a:rPr lang="en-US" smtClean="0"/>
+              <a:rPr lang="en-US"/>
               <a:t>Third level</a:t>
             </a:r>
           </a:p>
           <a:p>
             <a:pPr lvl="3"/>
             <a:r>
-              <a:rPr lang="en-US" smtClean="0"/>
+              <a:rPr lang="en-US"/>
               <a:t>Fourth level</a:t>
             </a:r>
           </a:p>
           <a:p>
             <a:pPr lvl="4"/>
             <a:r>
-              <a:rPr lang="en-US" smtClean="0"/>
+              <a:rPr lang="en-US"/>
               <a:t>Fifth level</a:t>
             </a:r>
-            <a:endParaRPr lang="en-US"/>
           </a:p>
         </p:txBody>
       </p:sp>
@@ -1304,38 +1309,37 @@
           <a:p>
             <a:pPr lvl="0"/>
             <a:r>
-              <a:rPr lang="en-US" smtClean="0"/>
+              <a:rPr lang="en-US"/>
               <a:t>Click to edit Master text styles</a:t>
             </a:r>
           </a:p>
           <a:p>
             <a:pPr lvl="1"/>
             <a:r>
-              <a:rPr lang="en-US" smtClean="0"/>
+              <a:rPr lang="en-US"/>
               <a:t>Second level</a:t>
             </a:r>
           </a:p>
           <a:p>
             <a:pPr lvl="2"/>
             <a:r>
-              <a:rPr lang="en-US" smtClean="0"/>
+              <a:rPr lang="en-US"/>
               <a:t>Third level</a:t>
             </a:r>
           </a:p>
           <a:p>
             <a:pPr lvl="3"/>
             <a:r>
-              <a:rPr lang="en-US" smtClean="0"/>
+              <a:rPr lang="en-US"/>
               <a:t>Fourth level</a:t>
             </a:r>
           </a:p>
           <a:p>
             <a:pPr lvl="4"/>
             <a:r>
-              <a:rPr lang="en-US" smtClean="0"/>
+              <a:rPr lang="en-US"/>
               <a:t>Fifth level</a:t>
             </a:r>
-            <a:endParaRPr lang="en-US"/>
           </a:p>
         </p:txBody>
       </p:sp>
@@ -1356,7 +1360,7 @@
           <a:p>
             <a:fld id="{5BCAD085-E8A6-8845-BD4E-CB4CCA059FC4}" type="datetimeFigureOut">
               <a:rPr lang="en-US" smtClean="0"/>
-              <a:t>1/27/13</a:t>
+              <a:t>3/30/2026</a:t>
             </a:fld>
             <a:endParaRPr lang="en-US"/>
           </a:p>
@@ -1398,7 +1402,7 @@
           <a:p>
             <a:fld id="{C1FF6DA9-008F-8B48-92A6-B652298478BF}" type="slidenum">
               <a:rPr lang="en-US" smtClean="0"/>
-              <a:t>‹#›</a:t>
+              <a:t>‹N°›</a:t>
             </a:fld>
             <a:endParaRPr lang="en-US"/>
           </a:p>
@@ -1454,10 +1458,9 @@
           </a:lstStyle>
           <a:p>
             <a:r>
-              <a:rPr lang="en-US" smtClean="0"/>
+              <a:rPr lang="en-US"/>
               <a:t>Click to edit Master title style</a:t>
             </a:r>
-            <a:endParaRPr lang="en-US"/>
           </a:p>
         </p:txBody>
       </p:sp>
@@ -1520,7 +1523,7 @@
           <a:p>
             <a:pPr lvl="0"/>
             <a:r>
-              <a:rPr lang="en-US" smtClean="0"/>
+              <a:rPr lang="en-US"/>
               <a:t>Click to edit Master text styles</a:t>
             </a:r>
           </a:p>
@@ -1576,38 +1579,37 @@
           <a:p>
             <a:pPr lvl="0"/>
             <a:r>
-              <a:rPr lang="en-US" smtClean="0"/>
+              <a:rPr lang="en-US"/>
               <a:t>Click to edit Master text styles</a:t>
             </a:r>
           </a:p>
           <a:p>
             <a:pPr lvl="1"/>
             <a:r>
-              <a:rPr lang="en-US" smtClean="0"/>
+              <a:rPr lang="en-US"/>
               <a:t>Second level</a:t>
             </a:r>
           </a:p>
           <a:p>
             <a:pPr lvl="2"/>
             <a:r>
-              <a:rPr lang="en-US" smtClean="0"/>
+              <a:rPr lang="en-US"/>
               <a:t>Third level</a:t>
             </a:r>
           </a:p>
           <a:p>
             <a:pPr lvl="3"/>
             <a:r>
-              <a:rPr lang="en-US" smtClean="0"/>
+              <a:rPr lang="en-US"/>
               <a:t>Fourth level</a:t>
             </a:r>
           </a:p>
           <a:p>
             <a:pPr lvl="4"/>
             <a:r>
-              <a:rPr lang="en-US" smtClean="0"/>
+              <a:rPr lang="en-US"/>
               <a:t>Fifth level</a:t>
             </a:r>
-            <a:endParaRPr lang="en-US"/>
           </a:p>
         </p:txBody>
       </p:sp>
@@ -1670,7 +1672,7 @@
           <a:p>
             <a:pPr lvl="0"/>
             <a:r>
-              <a:rPr lang="en-US" smtClean="0"/>
+              <a:rPr lang="en-US"/>
               <a:t>Click to edit Master text styles</a:t>
             </a:r>
           </a:p>
@@ -1726,38 +1728,37 @@
           <a:p>
             <a:pPr lvl="0"/>
             <a:r>
-              <a:rPr lang="en-US" smtClean="0"/>
+              <a:rPr lang="en-US"/>
               <a:t>Click to edit Master text styles</a:t>
             </a:r>
           </a:p>
           <a:p>
             <a:pPr lvl="1"/>
             <a:r>
-              <a:rPr lang="en-US" smtClean="0"/>
+              <a:rPr lang="en-US"/>
               <a:t>Second level</a:t>
             </a:r>
           </a:p>
           <a:p>
             <a:pPr lvl="2"/>
             <a:r>
-              <a:rPr lang="en-US" smtClean="0"/>
+              <a:rPr lang="en-US"/>
               <a:t>Third level</a:t>
             </a:r>
           </a:p>
           <a:p>
             <a:pPr lvl="3"/>
             <a:r>
-              <a:rPr lang="en-US" smtClean="0"/>
+              <a:rPr lang="en-US"/>
               <a:t>Fourth level</a:t>
             </a:r>
           </a:p>
           <a:p>
             <a:pPr lvl="4"/>
             <a:r>
-              <a:rPr lang="en-US" smtClean="0"/>
+              <a:rPr lang="en-US"/>
               <a:t>Fifth level</a:t>
             </a:r>
-            <a:endParaRPr lang="en-US"/>
           </a:p>
         </p:txBody>
       </p:sp>
@@ -1778,7 +1779,7 @@
           <a:p>
             <a:fld id="{5BCAD085-E8A6-8845-BD4E-CB4CCA059FC4}" type="datetimeFigureOut">
               <a:rPr lang="en-US" smtClean="0"/>
-              <a:t>1/27/13</a:t>
+              <a:t>3/30/2026</a:t>
             </a:fld>
             <a:endParaRPr lang="en-US"/>
           </a:p>
@@ -1820,7 +1821,7 @@
           <a:p>
             <a:fld id="{C1FF6DA9-008F-8B48-92A6-B652298478BF}" type="slidenum">
               <a:rPr lang="en-US" smtClean="0"/>
-              <a:t>‹#›</a:t>
+              <a:t>‹N°›</a:t>
             </a:fld>
             <a:endParaRPr lang="en-US"/>
           </a:p>
@@ -1872,10 +1873,9 @@
           <a:lstStyle/>
           <a:p>
             <a:r>
-              <a:rPr lang="en-US" smtClean="0"/>
+              <a:rPr lang="en-US"/>
               <a:t>Click to edit Master title style</a:t>
             </a:r>
-            <a:endParaRPr lang="en-US"/>
           </a:p>
         </p:txBody>
       </p:sp>
@@ -1896,7 +1896,7 @@
           <a:p>
             <a:fld id="{5BCAD085-E8A6-8845-BD4E-CB4CCA059FC4}" type="datetimeFigureOut">
               <a:rPr lang="en-US" smtClean="0"/>
-              <a:t>1/27/13</a:t>
+              <a:t>3/30/2026</a:t>
             </a:fld>
             <a:endParaRPr lang="en-US"/>
           </a:p>
@@ -1938,7 +1938,7 @@
           <a:p>
             <a:fld id="{C1FF6DA9-008F-8B48-92A6-B652298478BF}" type="slidenum">
               <a:rPr lang="en-US" smtClean="0"/>
-              <a:t>‹#›</a:t>
+              <a:t>‹N°›</a:t>
             </a:fld>
             <a:endParaRPr lang="en-US"/>
           </a:p>
@@ -1991,7 +1991,7 @@
           <a:p>
             <a:fld id="{5BCAD085-E8A6-8845-BD4E-CB4CCA059FC4}" type="datetimeFigureOut">
               <a:rPr lang="en-US" smtClean="0"/>
-              <a:t>1/27/13</a:t>
+              <a:t>3/30/2026</a:t>
             </a:fld>
             <a:endParaRPr lang="en-US"/>
           </a:p>
@@ -2033,7 +2033,7 @@
           <a:p>
             <a:fld id="{C1FF6DA9-008F-8B48-92A6-B652298478BF}" type="slidenum">
               <a:rPr lang="en-US" smtClean="0"/>
-              <a:t>‹#›</a:t>
+              <a:t>‹N°›</a:t>
             </a:fld>
             <a:endParaRPr lang="en-US"/>
           </a:p>
@@ -2094,10 +2094,9 @@
           </a:lstStyle>
           <a:p>
             <a:r>
-              <a:rPr lang="en-US" smtClean="0"/>
+              <a:rPr lang="en-US"/>
               <a:t>Click to edit Master title style</a:t>
             </a:r>
-            <a:endParaRPr lang="en-US"/>
           </a:p>
         </p:txBody>
       </p:sp>
@@ -2151,38 +2150,37 @@
           <a:p>
             <a:pPr lvl="0"/>
             <a:r>
-              <a:rPr lang="en-US" smtClean="0"/>
+              <a:rPr lang="en-US"/>
               <a:t>Click to edit Master text styles</a:t>
             </a:r>
           </a:p>
           <a:p>
             <a:pPr lvl="1"/>
             <a:r>
-              <a:rPr lang="en-US" smtClean="0"/>
+              <a:rPr lang="en-US"/>
               <a:t>Second level</a:t>
             </a:r>
           </a:p>
           <a:p>
             <a:pPr lvl="2"/>
             <a:r>
-              <a:rPr lang="en-US" smtClean="0"/>
+              <a:rPr lang="en-US"/>
               <a:t>Third level</a:t>
             </a:r>
           </a:p>
           <a:p>
             <a:pPr lvl="3"/>
             <a:r>
-              <a:rPr lang="en-US" smtClean="0"/>
+              <a:rPr lang="en-US"/>
               <a:t>Fourth level</a:t>
             </a:r>
           </a:p>
           <a:p>
             <a:pPr lvl="4"/>
             <a:r>
-              <a:rPr lang="en-US" smtClean="0"/>
+              <a:rPr lang="en-US"/>
               <a:t>Fifth level</a:t>
             </a:r>
-            <a:endParaRPr lang="en-US"/>
           </a:p>
         </p:txBody>
       </p:sp>
@@ -2245,7 +2243,7 @@
           <a:p>
             <a:pPr lvl="0"/>
             <a:r>
-              <a:rPr lang="en-US" smtClean="0"/>
+              <a:rPr lang="en-US"/>
               <a:t>Click to edit Master text styles</a:t>
             </a:r>
           </a:p>
@@ -2268,7 +2266,7 @@
           <a:p>
             <a:fld id="{5BCAD085-E8A6-8845-BD4E-CB4CCA059FC4}" type="datetimeFigureOut">
               <a:rPr lang="en-US" smtClean="0"/>
-              <a:t>1/27/13</a:t>
+              <a:t>3/30/2026</a:t>
             </a:fld>
             <a:endParaRPr lang="en-US"/>
           </a:p>
@@ -2310,7 +2308,7 @@
           <a:p>
             <a:fld id="{C1FF6DA9-008F-8B48-92A6-B652298478BF}" type="slidenum">
               <a:rPr lang="en-US" smtClean="0"/>
-              <a:t>‹#›</a:t>
+              <a:t>‹N°›</a:t>
             </a:fld>
             <a:endParaRPr lang="en-US"/>
           </a:p>
@@ -2371,10 +2369,9 @@
           </a:lstStyle>
           <a:p>
             <a:r>
-              <a:rPr lang="en-US" smtClean="0"/>
+              <a:rPr lang="en-US"/>
               <a:t>Click to edit Master title style</a:t>
             </a:r>
-            <a:endParaRPr lang="en-US"/>
           </a:p>
         </p:txBody>
       </p:sp>
@@ -2498,7 +2495,7 @@
           <a:p>
             <a:pPr lvl="0"/>
             <a:r>
-              <a:rPr lang="en-US" smtClean="0"/>
+              <a:rPr lang="en-US"/>
               <a:t>Click to edit Master text styles</a:t>
             </a:r>
           </a:p>
@@ -2521,7 +2518,7 @@
           <a:p>
             <a:fld id="{5BCAD085-E8A6-8845-BD4E-CB4CCA059FC4}" type="datetimeFigureOut">
               <a:rPr lang="en-US" smtClean="0"/>
-              <a:t>1/27/13</a:t>
+              <a:t>3/30/2026</a:t>
             </a:fld>
             <a:endParaRPr lang="en-US"/>
           </a:p>
@@ -2563,7 +2560,7 @@
           <a:p>
             <a:fld id="{C1FF6DA9-008F-8B48-92A6-B652298478BF}" type="slidenum">
               <a:rPr lang="en-US" smtClean="0"/>
-              <a:t>‹#›</a:t>
+              <a:t>‹N°›</a:t>
             </a:fld>
             <a:endParaRPr lang="en-US"/>
           </a:p>
@@ -2630,10 +2627,9 @@
           <a:lstStyle/>
           <a:p>
             <a:r>
-              <a:rPr lang="en-US" smtClean="0"/>
+              <a:rPr lang="en-US"/>
               <a:t>Click to edit Master title style</a:t>
             </a:r>
-            <a:endParaRPr lang="en-US"/>
           </a:p>
         </p:txBody>
       </p:sp>
@@ -2664,38 +2660,37 @@
           <a:p>
             <a:pPr lvl="0"/>
             <a:r>
-              <a:rPr lang="en-US" smtClean="0"/>
+              <a:rPr lang="en-US"/>
               <a:t>Click to edit Master text styles</a:t>
             </a:r>
           </a:p>
           <a:p>
             <a:pPr lvl="1"/>
             <a:r>
-              <a:rPr lang="en-US" smtClean="0"/>
+              <a:rPr lang="en-US"/>
               <a:t>Second level</a:t>
             </a:r>
           </a:p>
           <a:p>
             <a:pPr lvl="2"/>
             <a:r>
-              <a:rPr lang="en-US" smtClean="0"/>
+              <a:rPr lang="en-US"/>
               <a:t>Third level</a:t>
             </a:r>
           </a:p>
           <a:p>
             <a:pPr lvl="3"/>
             <a:r>
-              <a:rPr lang="en-US" smtClean="0"/>
+              <a:rPr lang="en-US"/>
               <a:t>Fourth level</a:t>
             </a:r>
           </a:p>
           <a:p>
             <a:pPr lvl="4"/>
             <a:r>
-              <a:rPr lang="en-US" smtClean="0"/>
+              <a:rPr lang="en-US"/>
               <a:t>Fifth level</a:t>
             </a:r>
-            <a:endParaRPr lang="en-US"/>
           </a:p>
         </p:txBody>
       </p:sp>
@@ -2734,7 +2729,7 @@
           <a:p>
             <a:fld id="{5BCAD085-E8A6-8845-BD4E-CB4CCA059FC4}" type="datetimeFigureOut">
               <a:rPr lang="en-US" smtClean="0"/>
-              <a:t>1/27/13</a:t>
+              <a:t>3/30/2026</a:t>
             </a:fld>
             <a:endParaRPr lang="en-US"/>
           </a:p>
@@ -2812,7 +2807,7 @@
           <a:p>
             <a:fld id="{C1FF6DA9-008F-8B48-92A6-B652298478BF}" type="slidenum">
               <a:rPr lang="en-US" smtClean="0"/>
-              <a:t>‹#›</a:t>
+              <a:t>‹N°›</a:t>
             </a:fld>
             <a:endParaRPr lang="en-US"/>
           </a:p>
@@ -3093,7 +3088,7 @@
 </file>
 
 <file path=ppt/slides/slide1.xml><?xml version="1.0" encoding="utf-8"?>
-<p:sld xmlns:a="http://schemas.openxmlformats.org/drawingml/2006/main" xmlns:p="http://schemas.openxmlformats.org/presentationml/2006/main" xmlns:r="http://schemas.openxmlformats.org/officeDocument/2006/relationships">
+<p:sld xmlns:a="http://schemas.openxmlformats.org/drawingml/2006/main" xmlns:r="http://schemas.openxmlformats.org/officeDocument/2006/relationships" xmlns:p="http://schemas.openxmlformats.org/presentationml/2006/main">
   <p:cSld>
     <p:spTree>
       <p:nvGrpSpPr>
@@ -3101,7 +3096,14 @@
         <p:cNvGrpSpPr/>
         <p:nvPr/>
       </p:nvGrpSpPr>
-      <p:grpSpPr/>
+      <p:grpSpPr>
+        <a:xfrm>
+          <a:off x="0" y="0"/>
+          <a:ext cx="0" cy="0"/>
+          <a:chOff x="0" y="0"/>
+          <a:chExt cx="0" cy="0"/>
+        </a:xfrm>
+      </p:grpSpPr>
       <p:sp>
         <p:nvSpPr>
           <p:cNvPr id="2" name="Rectangle 1"/>
@@ -3142,6 +3144,7 @@
           <a:lstStyle/>
           <a:p>
             <a:pPr algn="ctr"/>
+            <a:endParaRPr/>
           </a:p>
         </p:txBody>
       </p:sp>
@@ -3185,6 +3188,7 @@
           <a:lstStyle/>
           <a:p>
             <a:pPr algn="ctr"/>
+            <a:endParaRPr/>
           </a:p>
         </p:txBody>
       </p:sp>
@@ -3252,40 +3256,6 @@
                 </a:solidFill>
               </a:rPr>
               <a:t>TP MongoDB — Optimisation BDD NoSQL</a:t>
-            </a:r>
-          </a:p>
-        </p:txBody>
-      </p:sp>
-      <p:sp>
-        <p:nvSpPr>
-          <p:cNvPr id="6" name="TextBox 5"/>
-          <p:cNvSpPr txBox="1"/>
-          <p:nvPr/>
-        </p:nvSpPr>
-        <p:spPr>
-          <a:xfrm>
-            <a:off x="914400" y="2834640"/>
-            <a:ext cx="10360152" cy="457200"/>
-          </a:xfrm>
-          <a:prstGeom prst="rect">
-            <a:avLst/>
-          </a:prstGeom>
-          <a:noFill/>
-        </p:spPr>
-        <p:txBody>
-          <a:bodyPr wrap="square">
-            <a:spAutoFit/>
-          </a:bodyPr>
-          <a:lstStyle/>
-          <a:p>
-            <a:pPr algn="ctr"/>
-            <a:r>
-              <a:rPr sz="1600" b="0" i="0">
-                <a:solidFill>
-                  <a:srgbClr val="555555"/>
-                </a:solidFill>
-              </a:rPr>
-              <a:t>Projet C</a:t>
             </a:r>
           </a:p>
         </p:txBody>
@@ -3367,7 +3337,7 @@
 </file>
 
 <file path=ppt/slides/slide10.xml><?xml version="1.0" encoding="utf-8"?>
-<p:sld xmlns:a="http://schemas.openxmlformats.org/drawingml/2006/main" xmlns:p="http://schemas.openxmlformats.org/presentationml/2006/main" xmlns:r="http://schemas.openxmlformats.org/officeDocument/2006/relationships">
+<p:sld xmlns:a="http://schemas.openxmlformats.org/drawingml/2006/main" xmlns:r="http://schemas.openxmlformats.org/officeDocument/2006/relationships" xmlns:p="http://schemas.openxmlformats.org/presentationml/2006/main">
   <p:cSld>
     <p:spTree>
       <p:nvGrpSpPr>
@@ -3375,7 +3345,14 @@
         <p:cNvGrpSpPr/>
         <p:nvPr/>
       </p:nvGrpSpPr>
-      <p:grpSpPr/>
+      <p:grpSpPr>
+        <a:xfrm>
+          <a:off x="0" y="0"/>
+          <a:ext cx="0" cy="0"/>
+          <a:chOff x="0" y="0"/>
+          <a:chExt cx="0" cy="0"/>
+        </a:xfrm>
+      </p:grpSpPr>
       <p:sp>
         <p:nvSpPr>
           <p:cNvPr id="2" name="Rectangle 1"/>
@@ -3416,6 +3393,7 @@
           <a:lstStyle/>
           <a:p>
             <a:pPr algn="ctr"/>
+            <a:endParaRPr/>
           </a:p>
         </p:txBody>
       </p:sp>
@@ -3459,6 +3437,7 @@
           <a:lstStyle/>
           <a:p>
             <a:pPr algn="ctr"/>
+            <a:endParaRPr/>
           </a:p>
         </p:txBody>
       </p:sp>
@@ -3570,6 +3549,7 @@
           <a:lstStyle/>
           <a:p>
             <a:pPr algn="ctr"/>
+            <a:endParaRPr/>
           </a:p>
         </p:txBody>
       </p:sp>
@@ -3681,6 +3661,7 @@
           <a:lstStyle/>
           <a:p>
             <a:pPr algn="ctr"/>
+            <a:endParaRPr/>
           </a:p>
         </p:txBody>
       </p:sp>
@@ -3827,15 +3808,12 @@
             </a:r>
           </a:p>
           <a:p>
-            <a:r>
-              <a:rPr sz="1000">
-                <a:solidFill>
-                  <a:srgbClr val="A8FF78"/>
-                </a:solidFill>
-                <a:latin typeface="Courier New"/>
-              </a:rPr>
-              <a:t/>
-            </a:r>
+            <a:endParaRPr sz="1000">
+              <a:solidFill>
+                <a:srgbClr val="A8FF78"/>
+              </a:solidFill>
+              <a:latin typeface="Courier New"/>
+            </a:endParaRPr>
           </a:p>
           <a:p>
             <a:r>
@@ -4118,6 +4096,7 @@
           <a:lstStyle/>
           <a:p>
             <a:pPr algn="ctr"/>
+            <a:endParaRPr/>
           </a:p>
         </p:txBody>
       </p:sp>
@@ -4164,7 +4143,7 @@
 </file>
 
 <file path=ppt/slides/slide11.xml><?xml version="1.0" encoding="utf-8"?>
-<p:sld xmlns:a="http://schemas.openxmlformats.org/drawingml/2006/main" xmlns:p="http://schemas.openxmlformats.org/presentationml/2006/main" xmlns:r="http://schemas.openxmlformats.org/officeDocument/2006/relationships">
+<p:sld xmlns:a="http://schemas.openxmlformats.org/drawingml/2006/main" xmlns:r="http://schemas.openxmlformats.org/officeDocument/2006/relationships" xmlns:p="http://schemas.openxmlformats.org/presentationml/2006/main">
   <p:cSld>
     <p:spTree>
       <p:nvGrpSpPr>
@@ -4172,7 +4151,14 @@
         <p:cNvGrpSpPr/>
         <p:nvPr/>
       </p:nvGrpSpPr>
-      <p:grpSpPr/>
+      <p:grpSpPr>
+        <a:xfrm>
+          <a:off x="0" y="0"/>
+          <a:ext cx="0" cy="0"/>
+          <a:chOff x="0" y="0"/>
+          <a:chExt cx="0" cy="0"/>
+        </a:xfrm>
+      </p:grpSpPr>
       <p:sp>
         <p:nvSpPr>
           <p:cNvPr id="2" name="Rectangle 1"/>
@@ -4213,6 +4199,7 @@
           <a:lstStyle/>
           <a:p>
             <a:pPr algn="ctr"/>
+            <a:endParaRPr/>
           </a:p>
         </p:txBody>
       </p:sp>
@@ -4256,6 +4243,7 @@
           <a:lstStyle/>
           <a:p>
             <a:pPr algn="ctr"/>
+            <a:endParaRPr/>
           </a:p>
         </p:txBody>
       </p:sp>
@@ -4367,6 +4355,7 @@
           <a:lstStyle/>
           <a:p>
             <a:pPr algn="ctr"/>
+            <a:endParaRPr/>
           </a:p>
         </p:txBody>
       </p:sp>
@@ -4478,6 +4467,7 @@
           <a:lstStyle/>
           <a:p>
             <a:pPr algn="ctr"/>
+            <a:endParaRPr/>
           </a:p>
         </p:txBody>
       </p:sp>
@@ -4514,6 +4504,14 @@
             </a:r>
           </a:p>
           <a:p>
+            <a:endParaRPr sz="1100">
+              <a:solidFill>
+                <a:srgbClr val="A8FF78"/>
+              </a:solidFill>
+              <a:latin typeface="Courier New"/>
+            </a:endParaRPr>
+          </a:p>
+          <a:p>
             <a:r>
               <a:rPr sz="1100">
                 <a:solidFill>
@@ -4521,7 +4519,7 @@
                 </a:solidFill>
                 <a:latin typeface="Courier New"/>
               </a:rPr>
-              <a:t/>
+              <a:t>if order["status"] == "DELIVERED":</a:t>
             </a:r>
           </a:p>
           <a:p>
@@ -4532,30 +4530,16 @@
                 </a:solidFill>
                 <a:latin typeface="Courier New"/>
               </a:rPr>
-              <a:t>if order["status"] == "DELIVERED":</a:t>
-            </a:r>
-          </a:p>
-          <a:p>
-            <a:r>
-              <a:rPr sz="1100">
-                <a:solidFill>
-                  <a:srgbClr val="A8FF78"/>
-                </a:solidFill>
-                <a:latin typeface="Courier New"/>
-              </a:rPr>
               <a:t>    return { "livraison_reelle": order["actual_delivery_date"] }</a:t>
             </a:r>
           </a:p>
           <a:p>
-            <a:r>
-              <a:rPr sz="1100">
-                <a:solidFill>
-                  <a:srgbClr val="A8FF78"/>
-                </a:solidFill>
-                <a:latin typeface="Courier New"/>
-              </a:rPr>
-              <a:t/>
-            </a:r>
+            <a:endParaRPr sz="1100">
+              <a:solidFill>
+                <a:srgbClr val="A8FF78"/>
+              </a:solidFill>
+              <a:latin typeface="Courier New"/>
+            </a:endParaRPr>
           </a:p>
           <a:p>
             <a:r>
@@ -4754,6 +4738,7 @@
           <a:lstStyle/>
           <a:p>
             <a:pPr algn="ctr"/>
+            <a:endParaRPr/>
           </a:p>
         </p:txBody>
       </p:sp>
@@ -4876,6 +4861,7 @@
           <a:lstStyle/>
           <a:p>
             <a:pPr algn="ctr"/>
+            <a:endParaRPr/>
           </a:p>
         </p:txBody>
       </p:sp>
@@ -4986,6 +4972,7 @@
           <a:lstStyle/>
           <a:p>
             <a:pPr algn="ctr"/>
+            <a:endParaRPr/>
           </a:p>
         </p:txBody>
       </p:sp>
@@ -5032,7 +5019,7 @@
 </file>
 
 <file path=ppt/slides/slide12.xml><?xml version="1.0" encoding="utf-8"?>
-<p:sld xmlns:a="http://schemas.openxmlformats.org/drawingml/2006/main" xmlns:p="http://schemas.openxmlformats.org/presentationml/2006/main" xmlns:r="http://schemas.openxmlformats.org/officeDocument/2006/relationships">
+<p:sld xmlns:a="http://schemas.openxmlformats.org/drawingml/2006/main" xmlns:r="http://schemas.openxmlformats.org/officeDocument/2006/relationships" xmlns:p="http://schemas.openxmlformats.org/presentationml/2006/main">
   <p:cSld>
     <p:spTree>
       <p:nvGrpSpPr>
@@ -5040,7 +5027,14 @@
         <p:cNvGrpSpPr/>
         <p:nvPr/>
       </p:nvGrpSpPr>
-      <p:grpSpPr/>
+      <p:grpSpPr>
+        <a:xfrm>
+          <a:off x="0" y="0"/>
+          <a:ext cx="0" cy="0"/>
+          <a:chOff x="0" y="0"/>
+          <a:chExt cx="0" cy="0"/>
+        </a:xfrm>
+      </p:grpSpPr>
       <p:sp>
         <p:nvSpPr>
           <p:cNvPr id="2" name="Rectangle 1"/>
@@ -5081,6 +5075,7 @@
           <a:lstStyle/>
           <a:p>
             <a:pPr algn="ctr"/>
+            <a:endParaRPr/>
           </a:p>
         </p:txBody>
       </p:sp>
@@ -5124,6 +5119,7 @@
           <a:lstStyle/>
           <a:p>
             <a:pPr algn="ctr"/>
+            <a:endParaRPr/>
           </a:p>
         </p:txBody>
       </p:sp>
@@ -5235,6 +5231,7 @@
           <a:lstStyle/>
           <a:p>
             <a:pPr algn="ctr"/>
+            <a:endParaRPr/>
           </a:p>
         </p:txBody>
       </p:sp>
@@ -5278,6 +5275,7 @@
           <a:lstStyle/>
           <a:p>
             <a:pPr algn="ctr"/>
+            <a:endParaRPr/>
           </a:p>
         </p:txBody>
       </p:sp>
@@ -5355,6 +5353,7 @@
           <a:lstStyle/>
           <a:p>
             <a:pPr algn="ctr"/>
+            <a:endParaRPr/>
           </a:p>
         </p:txBody>
       </p:sp>
@@ -5432,6 +5431,7 @@
           <a:lstStyle/>
           <a:p>
             <a:pPr algn="ctr"/>
+            <a:endParaRPr/>
           </a:p>
         </p:txBody>
       </p:sp>
@@ -5509,6 +5509,7 @@
           <a:lstStyle/>
           <a:p>
             <a:pPr algn="ctr"/>
+            <a:endParaRPr/>
           </a:p>
         </p:txBody>
       </p:sp>
@@ -5586,6 +5587,7 @@
           <a:lstStyle/>
           <a:p>
             <a:pPr algn="ctr"/>
+            <a:endParaRPr/>
           </a:p>
         </p:txBody>
       </p:sp>
@@ -5663,6 +5665,7 @@
           <a:lstStyle/>
           <a:p>
             <a:pPr algn="ctr"/>
+            <a:endParaRPr/>
           </a:p>
         </p:txBody>
       </p:sp>
@@ -5740,6 +5743,7 @@
           <a:lstStyle/>
           <a:p>
             <a:pPr algn="ctr"/>
+            <a:endParaRPr/>
           </a:p>
         </p:txBody>
       </p:sp>
@@ -5817,6 +5821,7 @@
           <a:lstStyle/>
           <a:p>
             <a:pPr algn="ctr"/>
+            <a:endParaRPr/>
           </a:p>
         </p:txBody>
       </p:sp>
@@ -5894,6 +5899,7 @@
           <a:lstStyle/>
           <a:p>
             <a:pPr algn="ctr"/>
+            <a:endParaRPr/>
           </a:p>
         </p:txBody>
       </p:sp>
@@ -5971,6 +5977,7 @@
           <a:lstStyle/>
           <a:p>
             <a:pPr algn="ctr"/>
+            <a:endParaRPr/>
           </a:p>
         </p:txBody>
       </p:sp>
@@ -6048,6 +6055,7 @@
           <a:lstStyle/>
           <a:p>
             <a:pPr algn="ctr"/>
+            <a:endParaRPr/>
           </a:p>
         </p:txBody>
       </p:sp>
@@ -6125,6 +6133,7 @@
           <a:lstStyle/>
           <a:p>
             <a:pPr algn="ctr"/>
+            <a:endParaRPr/>
           </a:p>
         </p:txBody>
       </p:sp>
@@ -6202,6 +6211,7 @@
           <a:lstStyle/>
           <a:p>
             <a:pPr algn="ctr"/>
+            <a:endParaRPr/>
           </a:p>
         </p:txBody>
       </p:sp>
@@ -6279,6 +6289,7 @@
           <a:lstStyle/>
           <a:p>
             <a:pPr algn="ctr"/>
+            <a:endParaRPr/>
           </a:p>
         </p:txBody>
       </p:sp>
@@ -6356,6 +6367,7 @@
           <a:lstStyle/>
           <a:p>
             <a:pPr algn="ctr"/>
+            <a:endParaRPr/>
           </a:p>
         </p:txBody>
       </p:sp>
@@ -6433,6 +6445,7 @@
           <a:lstStyle/>
           <a:p>
             <a:pPr algn="ctr"/>
+            <a:endParaRPr/>
           </a:p>
         </p:txBody>
       </p:sp>
@@ -6510,6 +6523,7 @@
           <a:lstStyle/>
           <a:p>
             <a:pPr algn="ctr"/>
+            <a:endParaRPr/>
           </a:p>
         </p:txBody>
       </p:sp>
@@ -6587,6 +6601,7 @@
           <a:lstStyle/>
           <a:p>
             <a:pPr algn="ctr"/>
+            <a:endParaRPr/>
           </a:p>
         </p:txBody>
       </p:sp>
@@ -6664,6 +6679,7 @@
           <a:lstStyle/>
           <a:p>
             <a:pPr algn="ctr"/>
+            <a:endParaRPr/>
           </a:p>
         </p:txBody>
       </p:sp>
@@ -6741,6 +6757,7 @@
           <a:lstStyle/>
           <a:p>
             <a:pPr algn="ctr"/>
+            <a:endParaRPr/>
           </a:p>
         </p:txBody>
       </p:sp>
@@ -6818,6 +6835,7 @@
           <a:lstStyle/>
           <a:p>
             <a:pPr algn="ctr"/>
+            <a:endParaRPr/>
           </a:p>
         </p:txBody>
       </p:sp>
@@ -6895,6 +6913,7 @@
           <a:lstStyle/>
           <a:p>
             <a:pPr algn="ctr"/>
+            <a:endParaRPr/>
           </a:p>
         </p:txBody>
       </p:sp>
@@ -6972,6 +6991,7 @@
           <a:lstStyle/>
           <a:p>
             <a:pPr algn="ctr"/>
+            <a:endParaRPr/>
           </a:p>
         </p:txBody>
       </p:sp>
@@ -7049,6 +7069,7 @@
           <a:lstStyle/>
           <a:p>
             <a:pPr algn="ctr"/>
+            <a:endParaRPr/>
           </a:p>
         </p:txBody>
       </p:sp>
@@ -7126,6 +7147,7 @@
           <a:lstStyle/>
           <a:p>
             <a:pPr algn="ctr"/>
+            <a:endParaRPr/>
           </a:p>
         </p:txBody>
       </p:sp>
@@ -7203,6 +7225,7 @@
           <a:lstStyle/>
           <a:p>
             <a:pPr algn="ctr"/>
+            <a:endParaRPr/>
           </a:p>
         </p:txBody>
       </p:sp>
@@ -7280,6 +7303,7 @@
           <a:lstStyle/>
           <a:p>
             <a:pPr algn="ctr"/>
+            <a:endParaRPr/>
           </a:p>
         </p:txBody>
       </p:sp>
@@ -7357,6 +7381,7 @@
           <a:lstStyle/>
           <a:p>
             <a:pPr algn="ctr"/>
+            <a:endParaRPr/>
           </a:p>
         </p:txBody>
       </p:sp>
@@ -7434,6 +7459,7 @@
           <a:lstStyle/>
           <a:p>
             <a:pPr algn="ctr"/>
+            <a:endParaRPr/>
           </a:p>
         </p:txBody>
       </p:sp>
@@ -7511,6 +7537,7 @@
           <a:lstStyle/>
           <a:p>
             <a:pPr algn="ctr"/>
+            <a:endParaRPr/>
           </a:p>
         </p:txBody>
       </p:sp>
@@ -7588,6 +7615,7 @@
           <a:lstStyle/>
           <a:p>
             <a:pPr algn="ctr"/>
+            <a:endParaRPr/>
           </a:p>
         </p:txBody>
       </p:sp>
@@ -7665,6 +7693,7 @@
           <a:lstStyle/>
           <a:p>
             <a:pPr algn="ctr"/>
+            <a:endParaRPr/>
           </a:p>
         </p:txBody>
       </p:sp>
@@ -7742,6 +7771,7 @@
           <a:lstStyle/>
           <a:p>
             <a:pPr algn="ctr"/>
+            <a:endParaRPr/>
           </a:p>
         </p:txBody>
       </p:sp>
@@ -7819,6 +7849,7 @@
           <a:lstStyle/>
           <a:p>
             <a:pPr algn="ctr"/>
+            <a:endParaRPr/>
           </a:p>
         </p:txBody>
       </p:sp>
@@ -7865,7 +7896,7 @@
 </file>
 
 <file path=ppt/slides/slide13.xml><?xml version="1.0" encoding="utf-8"?>
-<p:sld xmlns:a="http://schemas.openxmlformats.org/drawingml/2006/main" xmlns:p="http://schemas.openxmlformats.org/presentationml/2006/main" xmlns:r="http://schemas.openxmlformats.org/officeDocument/2006/relationships">
+<p:sld xmlns:a="http://schemas.openxmlformats.org/drawingml/2006/main" xmlns:r="http://schemas.openxmlformats.org/officeDocument/2006/relationships" xmlns:p="http://schemas.openxmlformats.org/presentationml/2006/main">
   <p:cSld>
     <p:spTree>
       <p:nvGrpSpPr>
@@ -7873,7 +7904,14 @@
         <p:cNvGrpSpPr/>
         <p:nvPr/>
       </p:nvGrpSpPr>
-      <p:grpSpPr/>
+      <p:grpSpPr>
+        <a:xfrm>
+          <a:off x="0" y="0"/>
+          <a:ext cx="0" cy="0"/>
+          <a:chOff x="0" y="0"/>
+          <a:chExt cx="0" cy="0"/>
+        </a:xfrm>
+      </p:grpSpPr>
       <p:sp>
         <p:nvSpPr>
           <p:cNvPr id="2" name="Rectangle 1"/>
@@ -7914,6 +7952,7 @@
           <a:lstStyle/>
           <a:p>
             <a:pPr algn="ctr"/>
+            <a:endParaRPr/>
           </a:p>
         </p:txBody>
       </p:sp>
@@ -7957,6 +7996,7 @@
           <a:lstStyle/>
           <a:p>
             <a:pPr algn="ctr"/>
+            <a:endParaRPr/>
           </a:p>
         </p:txBody>
       </p:sp>
@@ -8068,6 +8108,7 @@
           <a:lstStyle/>
           <a:p>
             <a:pPr algn="ctr"/>
+            <a:endParaRPr/>
           </a:p>
         </p:txBody>
       </p:sp>
@@ -8262,6 +8303,7 @@
           <a:lstStyle/>
           <a:p>
             <a:pPr algn="ctr"/>
+            <a:endParaRPr/>
           </a:p>
         </p:txBody>
       </p:sp>
@@ -8384,6 +8426,7 @@
           <a:lstStyle/>
           <a:p>
             <a:pPr algn="ctr"/>
+            <a:endParaRPr/>
           </a:p>
         </p:txBody>
       </p:sp>
@@ -8495,6 +8538,7 @@
           <a:lstStyle/>
           <a:p>
             <a:pPr algn="ctr"/>
+            <a:endParaRPr/>
           </a:p>
         </p:txBody>
       </p:sp>
@@ -8606,6 +8650,7 @@
           <a:lstStyle/>
           <a:p>
             <a:pPr algn="ctr"/>
+            <a:endParaRPr/>
           </a:p>
         </p:txBody>
       </p:sp>
@@ -8717,6 +8762,7 @@
           <a:lstStyle/>
           <a:p>
             <a:pPr algn="ctr"/>
+            <a:endParaRPr/>
           </a:p>
         </p:txBody>
       </p:sp>
@@ -8828,6 +8874,7 @@
           <a:lstStyle/>
           <a:p>
             <a:pPr algn="ctr"/>
+            <a:endParaRPr/>
           </a:p>
         </p:txBody>
       </p:sp>
@@ -8908,7 +8955,7 @@
 </file>
 
 <file path=ppt/slides/slide14.xml><?xml version="1.0" encoding="utf-8"?>
-<p:sld xmlns:a="http://schemas.openxmlformats.org/drawingml/2006/main" xmlns:p="http://schemas.openxmlformats.org/presentationml/2006/main" xmlns:r="http://schemas.openxmlformats.org/officeDocument/2006/relationships">
+<p:sld xmlns:a="http://schemas.openxmlformats.org/drawingml/2006/main" xmlns:r="http://schemas.openxmlformats.org/officeDocument/2006/relationships" xmlns:p="http://schemas.openxmlformats.org/presentationml/2006/main">
   <p:cSld>
     <p:spTree>
       <p:nvGrpSpPr>
@@ -8916,7 +8963,14 @@
         <p:cNvGrpSpPr/>
         <p:nvPr/>
       </p:nvGrpSpPr>
-      <p:grpSpPr/>
+      <p:grpSpPr>
+        <a:xfrm>
+          <a:off x="0" y="0"/>
+          <a:ext cx="0" cy="0"/>
+          <a:chOff x="0" y="0"/>
+          <a:chExt cx="0" cy="0"/>
+        </a:xfrm>
+      </p:grpSpPr>
       <p:sp>
         <p:nvSpPr>
           <p:cNvPr id="2" name="Rectangle 1"/>
@@ -8957,6 +9011,7 @@
           <a:lstStyle/>
           <a:p>
             <a:pPr algn="ctr"/>
+            <a:endParaRPr/>
           </a:p>
         </p:txBody>
       </p:sp>
@@ -9000,6 +9055,7 @@
           <a:lstStyle/>
           <a:p>
             <a:pPr algn="ctr"/>
+            <a:endParaRPr/>
           </a:p>
         </p:txBody>
       </p:sp>
@@ -9231,7 +9287,7 @@
 </file>
 
 <file path=ppt/slides/slide15.xml><?xml version="1.0" encoding="utf-8"?>
-<p:sld xmlns:a="http://schemas.openxmlformats.org/drawingml/2006/main" xmlns:p="http://schemas.openxmlformats.org/presentationml/2006/main" xmlns:r="http://schemas.openxmlformats.org/officeDocument/2006/relationships">
+<p:sld xmlns:a="http://schemas.openxmlformats.org/drawingml/2006/main" xmlns:r="http://schemas.openxmlformats.org/officeDocument/2006/relationships" xmlns:p="http://schemas.openxmlformats.org/presentationml/2006/main">
   <p:cSld>
     <p:spTree>
       <p:nvGrpSpPr>
@@ -9239,7 +9295,14 @@
         <p:cNvGrpSpPr/>
         <p:nvPr/>
       </p:nvGrpSpPr>
-      <p:grpSpPr/>
+      <p:grpSpPr>
+        <a:xfrm>
+          <a:off x="0" y="0"/>
+          <a:ext cx="0" cy="0"/>
+          <a:chOff x="0" y="0"/>
+          <a:chExt cx="0" cy="0"/>
+        </a:xfrm>
+      </p:grpSpPr>
       <p:sp>
         <p:nvSpPr>
           <p:cNvPr id="2" name="Rectangle 1"/>
@@ -9280,6 +9343,7 @@
           <a:lstStyle/>
           <a:p>
             <a:pPr algn="ctr"/>
+            <a:endParaRPr/>
           </a:p>
         </p:txBody>
       </p:sp>
@@ -9323,6 +9387,7 @@
           <a:lstStyle/>
           <a:p>
             <a:pPr algn="ctr"/>
+            <a:endParaRPr/>
           </a:p>
         </p:txBody>
       </p:sp>
@@ -9434,6 +9499,7 @@
           <a:lstStyle/>
           <a:p>
             <a:pPr algn="ctr"/>
+            <a:endParaRPr/>
           </a:p>
         </p:txBody>
       </p:sp>
@@ -9813,6 +9879,7 @@
           <a:lstStyle/>
           <a:p>
             <a:pPr algn="ctr"/>
+            <a:endParaRPr/>
           </a:p>
         </p:txBody>
       </p:sp>
@@ -9859,7 +9926,7 @@
 </file>
 
 <file path=ppt/slides/slide2.xml><?xml version="1.0" encoding="utf-8"?>
-<p:sld xmlns:a="http://schemas.openxmlformats.org/drawingml/2006/main" xmlns:p="http://schemas.openxmlformats.org/presentationml/2006/main" xmlns:r="http://schemas.openxmlformats.org/officeDocument/2006/relationships">
+<p:sld xmlns:a="http://schemas.openxmlformats.org/drawingml/2006/main" xmlns:r="http://schemas.openxmlformats.org/officeDocument/2006/relationships" xmlns:p="http://schemas.openxmlformats.org/presentationml/2006/main">
   <p:cSld>
     <p:spTree>
       <p:nvGrpSpPr>
@@ -9867,7 +9934,14 @@
         <p:cNvGrpSpPr/>
         <p:nvPr/>
       </p:nvGrpSpPr>
-      <p:grpSpPr/>
+      <p:grpSpPr>
+        <a:xfrm>
+          <a:off x="0" y="0"/>
+          <a:ext cx="0" cy="0"/>
+          <a:chOff x="0" y="0"/>
+          <a:chExt cx="0" cy="0"/>
+        </a:xfrm>
+      </p:grpSpPr>
       <p:sp>
         <p:nvSpPr>
           <p:cNvPr id="2" name="Rectangle 1"/>
@@ -9908,6 +9982,7 @@
           <a:lstStyle/>
           <a:p>
             <a:pPr algn="ctr"/>
+            <a:endParaRPr/>
           </a:p>
         </p:txBody>
       </p:sp>
@@ -9951,6 +10026,7 @@
           <a:lstStyle/>
           <a:p>
             <a:pPr algn="ctr"/>
+            <a:endParaRPr/>
           </a:p>
         </p:txBody>
       </p:sp>
@@ -10062,6 +10138,7 @@
           <a:lstStyle/>
           <a:p>
             <a:pPr algn="ctr"/>
+            <a:endParaRPr/>
           </a:p>
         </p:txBody>
       </p:sp>
@@ -10324,6 +10401,7 @@
           <a:lstStyle/>
           <a:p>
             <a:pPr algn="ctr"/>
+            <a:endParaRPr/>
           </a:p>
         </p:txBody>
       </p:sp>
@@ -10435,6 +10513,7 @@
           <a:lstStyle/>
           <a:p>
             <a:pPr algn="ctr"/>
+            <a:endParaRPr/>
           </a:p>
         </p:txBody>
       </p:sp>
@@ -10546,6 +10625,7 @@
           <a:lstStyle/>
           <a:p>
             <a:pPr algn="ctr"/>
+            <a:endParaRPr/>
           </a:p>
         </p:txBody>
       </p:sp>
@@ -10657,6 +10737,7 @@
           <a:lstStyle/>
           <a:p>
             <a:pPr algn="ctr"/>
+            <a:endParaRPr/>
           </a:p>
         </p:txBody>
       </p:sp>
@@ -10738,7 +10819,7 @@
 </file>
 
 <file path=ppt/slides/slide3.xml><?xml version="1.0" encoding="utf-8"?>
-<p:sld xmlns:a="http://schemas.openxmlformats.org/drawingml/2006/main" xmlns:p="http://schemas.openxmlformats.org/presentationml/2006/main" xmlns:r="http://schemas.openxmlformats.org/officeDocument/2006/relationships">
+<p:sld xmlns:a="http://schemas.openxmlformats.org/drawingml/2006/main" xmlns:r="http://schemas.openxmlformats.org/officeDocument/2006/relationships" xmlns:p="http://schemas.openxmlformats.org/presentationml/2006/main">
   <p:cSld>
     <p:spTree>
       <p:nvGrpSpPr>
@@ -10746,7 +10827,14 @@
         <p:cNvGrpSpPr/>
         <p:nvPr/>
       </p:nvGrpSpPr>
-      <p:grpSpPr/>
+      <p:grpSpPr>
+        <a:xfrm>
+          <a:off x="0" y="0"/>
+          <a:ext cx="0" cy="0"/>
+          <a:chOff x="0" y="0"/>
+          <a:chExt cx="0" cy="0"/>
+        </a:xfrm>
+      </p:grpSpPr>
       <p:sp>
         <p:nvSpPr>
           <p:cNvPr id="2" name="Rectangle 1"/>
@@ -10787,6 +10875,7 @@
           <a:lstStyle/>
           <a:p>
             <a:pPr algn="ctr"/>
+            <a:endParaRPr/>
           </a:p>
         </p:txBody>
       </p:sp>
@@ -10830,6 +10919,7 @@
           <a:lstStyle/>
           <a:p>
             <a:pPr algn="ctr"/>
+            <a:endParaRPr/>
           </a:p>
         </p:txBody>
       </p:sp>
@@ -10941,6 +11031,7 @@
           <a:lstStyle/>
           <a:p>
             <a:pPr algn="ctr"/>
+            <a:endParaRPr/>
           </a:p>
         </p:txBody>
       </p:sp>
@@ -10984,6 +11075,7 @@
           <a:lstStyle/>
           <a:p>
             <a:pPr algn="ctr"/>
+            <a:endParaRPr/>
           </a:p>
         </p:txBody>
       </p:sp>
@@ -11061,6 +11153,7 @@
           <a:lstStyle/>
           <a:p>
             <a:pPr algn="ctr"/>
+            <a:endParaRPr/>
           </a:p>
         </p:txBody>
       </p:sp>
@@ -11140,6 +11233,7 @@
           <a:lstStyle/>
           <a:p>
             <a:pPr algn="ctr"/>
+            <a:endParaRPr/>
           </a:p>
         </p:txBody>
       </p:sp>
@@ -11217,6 +11311,7 @@
           <a:lstStyle/>
           <a:p>
             <a:pPr algn="ctr"/>
+            <a:endParaRPr/>
           </a:p>
         </p:txBody>
       </p:sp>
@@ -11296,6 +11391,7 @@
           <a:lstStyle/>
           <a:p>
             <a:pPr algn="ctr"/>
+            <a:endParaRPr/>
           </a:p>
         </p:txBody>
       </p:sp>
@@ -11373,6 +11469,7 @@
           <a:lstStyle/>
           <a:p>
             <a:pPr algn="ctr"/>
+            <a:endParaRPr/>
           </a:p>
         </p:txBody>
       </p:sp>
@@ -11452,6 +11549,7 @@
           <a:lstStyle/>
           <a:p>
             <a:pPr algn="ctr"/>
+            <a:endParaRPr/>
           </a:p>
         </p:txBody>
       </p:sp>
@@ -11529,6 +11627,7 @@
           <a:lstStyle/>
           <a:p>
             <a:pPr algn="ctr"/>
+            <a:endParaRPr/>
           </a:p>
         </p:txBody>
       </p:sp>
@@ -11645,7 +11744,7 @@
 </file>
 
 <file path=ppt/slides/slide4.xml><?xml version="1.0" encoding="utf-8"?>
-<p:sld xmlns:a="http://schemas.openxmlformats.org/drawingml/2006/main" xmlns:p="http://schemas.openxmlformats.org/presentationml/2006/main" xmlns:r="http://schemas.openxmlformats.org/officeDocument/2006/relationships">
+<p:sld xmlns:a="http://schemas.openxmlformats.org/drawingml/2006/main" xmlns:r="http://schemas.openxmlformats.org/officeDocument/2006/relationships" xmlns:p="http://schemas.openxmlformats.org/presentationml/2006/main">
   <p:cSld>
     <p:spTree>
       <p:nvGrpSpPr>
@@ -11653,7 +11752,14 @@
         <p:cNvGrpSpPr/>
         <p:nvPr/>
       </p:nvGrpSpPr>
-      <p:grpSpPr/>
+      <p:grpSpPr>
+        <a:xfrm>
+          <a:off x="0" y="0"/>
+          <a:ext cx="0" cy="0"/>
+          <a:chOff x="0" y="0"/>
+          <a:chExt cx="0" cy="0"/>
+        </a:xfrm>
+      </p:grpSpPr>
       <p:sp>
         <p:nvSpPr>
           <p:cNvPr id="2" name="Rectangle 1"/>
@@ -11694,6 +11800,7 @@
           <a:lstStyle/>
           <a:p>
             <a:pPr algn="ctr"/>
+            <a:endParaRPr/>
           </a:p>
         </p:txBody>
       </p:sp>
@@ -11737,6 +11844,7 @@
           <a:lstStyle/>
           <a:p>
             <a:pPr algn="ctr"/>
+            <a:endParaRPr/>
           </a:p>
         </p:txBody>
       </p:sp>
@@ -11848,6 +11956,7 @@
           <a:lstStyle/>
           <a:p>
             <a:pPr algn="ctr"/>
+            <a:endParaRPr/>
           </a:p>
         </p:txBody>
       </p:sp>
@@ -11891,6 +12000,7 @@
           <a:lstStyle/>
           <a:p>
             <a:pPr algn="ctr"/>
+            <a:endParaRPr/>
           </a:p>
         </p:txBody>
       </p:sp>
@@ -11968,6 +12078,7 @@
           <a:lstStyle/>
           <a:p>
             <a:pPr algn="ctr"/>
+            <a:endParaRPr/>
           </a:p>
         </p:txBody>
       </p:sp>
@@ -12215,6 +12326,7 @@
           <a:lstStyle/>
           <a:p>
             <a:pPr algn="ctr"/>
+            <a:endParaRPr/>
           </a:p>
         </p:txBody>
       </p:sp>
@@ -12292,6 +12404,7 @@
           <a:lstStyle/>
           <a:p>
             <a:pPr algn="ctr"/>
+            <a:endParaRPr/>
           </a:p>
         </p:txBody>
       </p:sp>
@@ -12539,6 +12652,7 @@
           <a:lstStyle/>
           <a:p>
             <a:pPr algn="ctr"/>
+            <a:endParaRPr/>
           </a:p>
         </p:txBody>
       </p:sp>
@@ -12616,6 +12730,7 @@
           <a:lstStyle/>
           <a:p>
             <a:pPr algn="ctr"/>
+            <a:endParaRPr/>
           </a:p>
         </p:txBody>
       </p:sp>
@@ -12897,6 +13012,7 @@
           <a:lstStyle/>
           <a:p>
             <a:pPr algn="ctr"/>
+            <a:endParaRPr/>
           </a:p>
         </p:txBody>
       </p:sp>
@@ -12974,6 +13090,7 @@
           <a:lstStyle/>
           <a:p>
             <a:pPr algn="ctr"/>
+            <a:endParaRPr/>
           </a:p>
         </p:txBody>
       </p:sp>
@@ -13326,7 +13443,7 @@
 </file>
 
 <file path=ppt/slides/slide5.xml><?xml version="1.0" encoding="utf-8"?>
-<p:sld xmlns:a="http://schemas.openxmlformats.org/drawingml/2006/main" xmlns:p="http://schemas.openxmlformats.org/presentationml/2006/main" xmlns:r="http://schemas.openxmlformats.org/officeDocument/2006/relationships">
+<p:sld xmlns:a="http://schemas.openxmlformats.org/drawingml/2006/main" xmlns:r="http://schemas.openxmlformats.org/officeDocument/2006/relationships" xmlns:p="http://schemas.openxmlformats.org/presentationml/2006/main">
   <p:cSld>
     <p:spTree>
       <p:nvGrpSpPr>
@@ -13334,7 +13451,14 @@
         <p:cNvGrpSpPr/>
         <p:nvPr/>
       </p:nvGrpSpPr>
-      <p:grpSpPr/>
+      <p:grpSpPr>
+        <a:xfrm>
+          <a:off x="0" y="0"/>
+          <a:ext cx="0" cy="0"/>
+          <a:chOff x="0" y="0"/>
+          <a:chExt cx="0" cy="0"/>
+        </a:xfrm>
+      </p:grpSpPr>
       <p:sp>
         <p:nvSpPr>
           <p:cNvPr id="2" name="Rectangle 1"/>
@@ -13375,6 +13499,7 @@
           <a:lstStyle/>
           <a:p>
             <a:pPr algn="ctr"/>
+            <a:endParaRPr/>
           </a:p>
         </p:txBody>
       </p:sp>
@@ -13418,6 +13543,7 @@
           <a:lstStyle/>
           <a:p>
             <a:pPr algn="ctr"/>
+            <a:endParaRPr/>
           </a:p>
         </p:txBody>
       </p:sp>
@@ -13529,6 +13655,7 @@
           <a:lstStyle/>
           <a:p>
             <a:pPr algn="ctr"/>
+            <a:endParaRPr/>
           </a:p>
         </p:txBody>
       </p:sp>
@@ -13572,6 +13699,7 @@
           <a:lstStyle/>
           <a:p>
             <a:pPr algn="ctr"/>
+            <a:endParaRPr/>
           </a:p>
         </p:txBody>
       </p:sp>
@@ -13747,6 +13875,7 @@
           <a:lstStyle/>
           <a:p>
             <a:pPr algn="ctr"/>
+            <a:endParaRPr/>
           </a:p>
         </p:txBody>
       </p:sp>
@@ -13941,6 +14070,7 @@
           <a:lstStyle/>
           <a:p>
             <a:pPr algn="ctr"/>
+            <a:endParaRPr/>
           </a:p>
         </p:txBody>
       </p:sp>
@@ -14018,6 +14148,7 @@
           <a:lstStyle/>
           <a:p>
             <a:pPr algn="ctr"/>
+            <a:endParaRPr/>
           </a:p>
         </p:txBody>
       </p:sp>
@@ -14095,6 +14226,7 @@
           <a:lstStyle/>
           <a:p>
             <a:pPr algn="ctr"/>
+            <a:endParaRPr/>
           </a:p>
         </p:txBody>
       </p:sp>
@@ -14172,6 +14304,7 @@
           <a:lstStyle/>
           <a:p>
             <a:pPr algn="ctr"/>
+            <a:endParaRPr/>
           </a:p>
         </p:txBody>
       </p:sp>
@@ -14249,6 +14382,7 @@
           <a:lstStyle/>
           <a:p>
             <a:pPr algn="ctr"/>
+            <a:endParaRPr/>
           </a:p>
         </p:txBody>
       </p:sp>
@@ -14326,6 +14460,7 @@
           <a:lstStyle/>
           <a:p>
             <a:pPr algn="ctr"/>
+            <a:endParaRPr/>
           </a:p>
         </p:txBody>
       </p:sp>
@@ -14403,6 +14538,7 @@
           <a:lstStyle/>
           <a:p>
             <a:pPr algn="ctr"/>
+            <a:endParaRPr/>
           </a:p>
         </p:txBody>
       </p:sp>
@@ -14480,6 +14616,7 @@
           <a:lstStyle/>
           <a:p>
             <a:pPr algn="ctr"/>
+            <a:endParaRPr/>
           </a:p>
         </p:txBody>
       </p:sp>
@@ -14557,6 +14694,7 @@
           <a:lstStyle/>
           <a:p>
             <a:pPr algn="ctr"/>
+            <a:endParaRPr/>
           </a:p>
         </p:txBody>
       </p:sp>
@@ -14634,6 +14772,7 @@
           <a:lstStyle/>
           <a:p>
             <a:pPr algn="ctr"/>
+            <a:endParaRPr/>
           </a:p>
         </p:txBody>
       </p:sp>
@@ -14711,6 +14850,7 @@
           <a:lstStyle/>
           <a:p>
             <a:pPr algn="ctr"/>
+            <a:endParaRPr/>
           </a:p>
         </p:txBody>
       </p:sp>
@@ -14788,6 +14928,7 @@
           <a:lstStyle/>
           <a:p>
             <a:pPr algn="ctr"/>
+            <a:endParaRPr/>
           </a:p>
         </p:txBody>
       </p:sp>
@@ -14834,7 +14975,7 @@
 </file>
 
 <file path=ppt/slides/slide6.xml><?xml version="1.0" encoding="utf-8"?>
-<p:sld xmlns:a="http://schemas.openxmlformats.org/drawingml/2006/main" xmlns:p="http://schemas.openxmlformats.org/presentationml/2006/main" xmlns:r="http://schemas.openxmlformats.org/officeDocument/2006/relationships">
+<p:sld xmlns:a="http://schemas.openxmlformats.org/drawingml/2006/main" xmlns:r="http://schemas.openxmlformats.org/officeDocument/2006/relationships" xmlns:p="http://schemas.openxmlformats.org/presentationml/2006/main">
   <p:cSld>
     <p:spTree>
       <p:nvGrpSpPr>
@@ -14842,7 +14983,14 @@
         <p:cNvGrpSpPr/>
         <p:nvPr/>
       </p:nvGrpSpPr>
-      <p:grpSpPr/>
+      <p:grpSpPr>
+        <a:xfrm>
+          <a:off x="0" y="0"/>
+          <a:ext cx="0" cy="0"/>
+          <a:chOff x="0" y="0"/>
+          <a:chExt cx="0" cy="0"/>
+        </a:xfrm>
+      </p:grpSpPr>
       <p:sp>
         <p:nvSpPr>
           <p:cNvPr id="2" name="Rectangle 1"/>
@@ -14883,6 +15031,7 @@
           <a:lstStyle/>
           <a:p>
             <a:pPr algn="ctr"/>
+            <a:endParaRPr/>
           </a:p>
         </p:txBody>
       </p:sp>
@@ -14926,6 +15075,7 @@
           <a:lstStyle/>
           <a:p>
             <a:pPr algn="ctr"/>
+            <a:endParaRPr/>
           </a:p>
         </p:txBody>
       </p:sp>
@@ -15037,6 +15187,7 @@
           <a:lstStyle/>
           <a:p>
             <a:pPr algn="ctr"/>
+            <a:endParaRPr/>
           </a:p>
         </p:txBody>
       </p:sp>
@@ -15148,6 +15299,7 @@
           <a:lstStyle/>
           <a:p>
             <a:pPr algn="ctr"/>
+            <a:endParaRPr/>
           </a:p>
         </p:txBody>
       </p:sp>
@@ -15531,7 +15683,7 @@
 </file>
 
 <file path=ppt/slides/slide7.xml><?xml version="1.0" encoding="utf-8"?>
-<p:sld xmlns:a="http://schemas.openxmlformats.org/drawingml/2006/main" xmlns:p="http://schemas.openxmlformats.org/presentationml/2006/main" xmlns:r="http://schemas.openxmlformats.org/officeDocument/2006/relationships">
+<p:sld xmlns:a="http://schemas.openxmlformats.org/drawingml/2006/main" xmlns:r="http://schemas.openxmlformats.org/officeDocument/2006/relationships" xmlns:p="http://schemas.openxmlformats.org/presentationml/2006/main">
   <p:cSld>
     <p:spTree>
       <p:nvGrpSpPr>
@@ -15539,7 +15691,14 @@
         <p:cNvGrpSpPr/>
         <p:nvPr/>
       </p:nvGrpSpPr>
-      <p:grpSpPr/>
+      <p:grpSpPr>
+        <a:xfrm>
+          <a:off x="0" y="0"/>
+          <a:ext cx="0" cy="0"/>
+          <a:chOff x="0" y="0"/>
+          <a:chExt cx="0" cy="0"/>
+        </a:xfrm>
+      </p:grpSpPr>
       <p:sp>
         <p:nvSpPr>
           <p:cNvPr id="2" name="Rectangle 1"/>
@@ -15580,6 +15739,7 @@
           <a:lstStyle/>
           <a:p>
             <a:pPr algn="ctr"/>
+            <a:endParaRPr/>
           </a:p>
         </p:txBody>
       </p:sp>
@@ -15623,6 +15783,7 @@
           <a:lstStyle/>
           <a:p>
             <a:pPr algn="ctr"/>
+            <a:endParaRPr/>
           </a:p>
         </p:txBody>
       </p:sp>
@@ -15734,6 +15895,7 @@
           <a:lstStyle/>
           <a:p>
             <a:pPr algn="ctr"/>
+            <a:endParaRPr/>
           </a:p>
         </p:txBody>
       </p:sp>
@@ -15777,6 +15939,7 @@
           <a:lstStyle/>
           <a:p>
             <a:pPr algn="ctr"/>
+            <a:endParaRPr/>
           </a:p>
         </p:txBody>
       </p:sp>
@@ -15890,6 +16053,7 @@
           <a:lstStyle/>
           <a:p>
             <a:pPr algn="ctr"/>
+            <a:endParaRPr/>
           </a:p>
         </p:txBody>
       </p:sp>
@@ -16003,6 +16167,7 @@
           <a:lstStyle/>
           <a:p>
             <a:pPr algn="ctr"/>
+            <a:endParaRPr/>
           </a:p>
         </p:txBody>
       </p:sp>
@@ -16116,6 +16281,7 @@
           <a:lstStyle/>
           <a:p>
             <a:pPr algn="ctr"/>
+            <a:endParaRPr/>
           </a:p>
         </p:txBody>
       </p:sp>
@@ -16349,7 +16515,7 @@
 </file>
 
 <file path=ppt/slides/slide8.xml><?xml version="1.0" encoding="utf-8"?>
-<p:sld xmlns:a="http://schemas.openxmlformats.org/drawingml/2006/main" xmlns:p="http://schemas.openxmlformats.org/presentationml/2006/main" xmlns:r="http://schemas.openxmlformats.org/officeDocument/2006/relationships">
+<p:sld xmlns:a="http://schemas.openxmlformats.org/drawingml/2006/main" xmlns:r="http://schemas.openxmlformats.org/officeDocument/2006/relationships" xmlns:p="http://schemas.openxmlformats.org/presentationml/2006/main">
   <p:cSld>
     <p:spTree>
       <p:nvGrpSpPr>
@@ -16357,7 +16523,14 @@
         <p:cNvGrpSpPr/>
         <p:nvPr/>
       </p:nvGrpSpPr>
-      <p:grpSpPr/>
+      <p:grpSpPr>
+        <a:xfrm>
+          <a:off x="0" y="0"/>
+          <a:ext cx="0" cy="0"/>
+          <a:chOff x="0" y="0"/>
+          <a:chExt cx="0" cy="0"/>
+        </a:xfrm>
+      </p:grpSpPr>
       <p:sp>
         <p:nvSpPr>
           <p:cNvPr id="2" name="Rectangle 1"/>
@@ -16398,6 +16571,7 @@
           <a:lstStyle/>
           <a:p>
             <a:pPr algn="ctr"/>
+            <a:endParaRPr/>
           </a:p>
         </p:txBody>
       </p:sp>
@@ -16441,6 +16615,7 @@
           <a:lstStyle/>
           <a:p>
             <a:pPr algn="ctr"/>
+            <a:endParaRPr/>
           </a:p>
         </p:txBody>
       </p:sp>
@@ -16552,6 +16727,7 @@
           <a:lstStyle/>
           <a:p>
             <a:pPr algn="ctr"/>
+            <a:endParaRPr/>
           </a:p>
         </p:txBody>
       </p:sp>
@@ -16663,6 +16839,7 @@
           <a:lstStyle/>
           <a:p>
             <a:pPr algn="ctr"/>
+            <a:endParaRPr/>
           </a:p>
         </p:txBody>
       </p:sp>
@@ -16950,6 +17127,7 @@
           <a:lstStyle/>
           <a:p>
             <a:pPr algn="ctr"/>
+            <a:endParaRPr/>
           </a:p>
         </p:txBody>
       </p:sp>
@@ -17082,6 +17260,7 @@
           <a:lstStyle/>
           <a:p>
             <a:pPr algn="ctr"/>
+            <a:endParaRPr/>
           </a:p>
         </p:txBody>
       </p:sp>
@@ -17128,7 +17307,7 @@
 </file>
 
 <file path=ppt/slides/slide9.xml><?xml version="1.0" encoding="utf-8"?>
-<p:sld xmlns:a="http://schemas.openxmlformats.org/drawingml/2006/main" xmlns:p="http://schemas.openxmlformats.org/presentationml/2006/main" xmlns:r="http://schemas.openxmlformats.org/officeDocument/2006/relationships">
+<p:sld xmlns:a="http://schemas.openxmlformats.org/drawingml/2006/main" xmlns:r="http://schemas.openxmlformats.org/officeDocument/2006/relationships" xmlns:p="http://schemas.openxmlformats.org/presentationml/2006/main">
   <p:cSld>
     <p:spTree>
       <p:nvGrpSpPr>
@@ -17136,7 +17315,14 @@
         <p:cNvGrpSpPr/>
         <p:nvPr/>
       </p:nvGrpSpPr>
-      <p:grpSpPr/>
+      <p:grpSpPr>
+        <a:xfrm>
+          <a:off x="0" y="0"/>
+          <a:ext cx="0" cy="0"/>
+          <a:chOff x="0" y="0"/>
+          <a:chExt cx="0" cy="0"/>
+        </a:xfrm>
+      </p:grpSpPr>
       <p:sp>
         <p:nvSpPr>
           <p:cNvPr id="2" name="Rectangle 1"/>
@@ -17177,6 +17363,7 @@
           <a:lstStyle/>
           <a:p>
             <a:pPr algn="ctr"/>
+            <a:endParaRPr/>
           </a:p>
         </p:txBody>
       </p:sp>
@@ -17220,6 +17407,7 @@
           <a:lstStyle/>
           <a:p>
             <a:pPr algn="ctr"/>
+            <a:endParaRPr/>
           </a:p>
         </p:txBody>
       </p:sp>
@@ -17331,6 +17519,7 @@
           <a:lstStyle/>
           <a:p>
             <a:pPr algn="ctr"/>
+            <a:endParaRPr/>
           </a:p>
         </p:txBody>
       </p:sp>
@@ -17442,6 +17631,7 @@
           <a:lstStyle/>
           <a:p>
             <a:pPr algn="ctr"/>
+            <a:endParaRPr/>
           </a:p>
         </p:txBody>
       </p:sp>
@@ -17806,6 +17996,7 @@
           <a:lstStyle/>
           <a:p>
             <a:pPr algn="ctr"/>
+            <a:endParaRPr/>
           </a:p>
         </p:txBody>
       </p:sp>
@@ -17949,6 +18140,7 @@
           <a:lstStyle/>
           <a:p>
             <a:pPr algn="ctr"/>
+            <a:endParaRPr/>
           </a:p>
         </p:txBody>
       </p:sp>
